--- a/2025-MLS-projections/2025 MLS results using 2020.pptx
+++ b/2025-MLS-projections/2025 MLS results using 2020.pptx
@@ -265,7 +265,7 @@
           <a:p>
             <a:fld id="{BC031577-5721-4099-A8DD-A5FBA8B6DDB0}" type="datetimeFigureOut">
               <a:rPr lang="en-US" smtClean="0"/>
-              <a:t>4/8/2025</a:t>
+              <a:t>4/10/2025</a:t>
             </a:fld>
             <a:endParaRPr lang="en-US"/>
           </a:p>
@@ -1059,7 +1059,7 @@
           <a:p>
             <a:fld id="{2F4D5645-23AA-4DCF-893C-4CB75AE73D5B}" type="datetimeFigureOut">
               <a:rPr lang="en-US" smtClean="0"/>
-              <a:t>4/8/2025</a:t>
+              <a:t>4/10/2025</a:t>
             </a:fld>
             <a:endParaRPr lang="en-US"/>
           </a:p>
@@ -1257,7 +1257,7 @@
           <a:p>
             <a:fld id="{2F4D5645-23AA-4DCF-893C-4CB75AE73D5B}" type="datetimeFigureOut">
               <a:rPr lang="en-US" smtClean="0"/>
-              <a:t>4/8/2025</a:t>
+              <a:t>4/10/2025</a:t>
             </a:fld>
             <a:endParaRPr lang="en-US"/>
           </a:p>
@@ -1465,7 +1465,7 @@
           <a:p>
             <a:fld id="{2F4D5645-23AA-4DCF-893C-4CB75AE73D5B}" type="datetimeFigureOut">
               <a:rPr lang="en-US" smtClean="0"/>
-              <a:t>4/8/2025</a:t>
+              <a:t>4/10/2025</a:t>
             </a:fld>
             <a:endParaRPr lang="en-US"/>
           </a:p>
@@ -2022,7 +2022,7 @@
           <a:p>
             <a:fld id="{2F4D5645-23AA-4DCF-893C-4CB75AE73D5B}" type="datetimeFigureOut">
               <a:rPr lang="en-US" smtClean="0"/>
-              <a:t>4/8/2025</a:t>
+              <a:t>4/10/2025</a:t>
             </a:fld>
             <a:endParaRPr lang="en-US"/>
           </a:p>
@@ -2297,7 +2297,7 @@
           <a:p>
             <a:fld id="{2F4D5645-23AA-4DCF-893C-4CB75AE73D5B}" type="datetimeFigureOut">
               <a:rPr lang="en-US" smtClean="0"/>
-              <a:t>4/8/2025</a:t>
+              <a:t>4/10/2025</a:t>
             </a:fld>
             <a:endParaRPr lang="en-US"/>
           </a:p>
@@ -2562,7 +2562,7 @@
           <a:p>
             <a:fld id="{2F4D5645-23AA-4DCF-893C-4CB75AE73D5B}" type="datetimeFigureOut">
               <a:rPr lang="en-US" smtClean="0"/>
-              <a:t>4/8/2025</a:t>
+              <a:t>4/10/2025</a:t>
             </a:fld>
             <a:endParaRPr lang="en-US"/>
           </a:p>
@@ -2974,7 +2974,7 @@
           <a:p>
             <a:fld id="{2F4D5645-23AA-4DCF-893C-4CB75AE73D5B}" type="datetimeFigureOut">
               <a:rPr lang="en-US" smtClean="0"/>
-              <a:t>4/8/2025</a:t>
+              <a:t>4/10/2025</a:t>
             </a:fld>
             <a:endParaRPr lang="en-US"/>
           </a:p>
@@ -3115,7 +3115,7 @@
           <a:p>
             <a:fld id="{2F4D5645-23AA-4DCF-893C-4CB75AE73D5B}" type="datetimeFigureOut">
               <a:rPr lang="en-US" smtClean="0"/>
-              <a:t>4/8/2025</a:t>
+              <a:t>4/10/2025</a:t>
             </a:fld>
             <a:endParaRPr lang="en-US"/>
           </a:p>
@@ -3228,7 +3228,7 @@
           <a:p>
             <a:fld id="{2F4D5645-23AA-4DCF-893C-4CB75AE73D5B}" type="datetimeFigureOut">
               <a:rPr lang="en-US" smtClean="0"/>
-              <a:t>4/8/2025</a:t>
+              <a:t>4/10/2025</a:t>
             </a:fld>
             <a:endParaRPr lang="en-US"/>
           </a:p>
@@ -3539,7 +3539,7 @@
           <a:p>
             <a:fld id="{2F4D5645-23AA-4DCF-893C-4CB75AE73D5B}" type="datetimeFigureOut">
               <a:rPr lang="en-US" smtClean="0"/>
-              <a:t>4/8/2025</a:t>
+              <a:t>4/10/2025</a:t>
             </a:fld>
             <a:endParaRPr lang="en-US"/>
           </a:p>
@@ -3827,7 +3827,7 @@
           <a:p>
             <a:fld id="{2F4D5645-23AA-4DCF-893C-4CB75AE73D5B}" type="datetimeFigureOut">
               <a:rPr lang="en-US" smtClean="0"/>
-              <a:t>4/8/2025</a:t>
+              <a:t>4/10/2025</a:t>
             </a:fld>
             <a:endParaRPr lang="en-US"/>
           </a:p>
@@ -4068,7 +4068,7 @@
           <a:p>
             <a:fld id="{2F4D5645-23AA-4DCF-893C-4CB75AE73D5B}" type="datetimeFigureOut">
               <a:rPr lang="en-US" smtClean="0"/>
-              <a:t>4/8/2025</a:t>
+              <a:t>4/10/2025</a:t>
             </a:fld>
             <a:endParaRPr lang="en-US"/>
           </a:p>
@@ -4518,7 +4518,7 @@
             </a:br>
             <a:r>
               <a:rPr lang="en-US" sz="4000" dirty="0"/>
-              <a:t>Revised Projections for CMM 24-06</a:t>
+              <a:t>2025 Projection Scenarios for CMM 24-06</a:t>
             </a:r>
             <a:endParaRPr lang="en-US" dirty="0"/>
           </a:p>
@@ -6092,17 +6092,27 @@
         </p:nvSpPr>
         <p:spPr>
           <a:xfrm>
-            <a:off x="762786" y="84841"/>
-            <a:ext cx="10515600" cy="879983"/>
+            <a:off x="0" y="94542"/>
+            <a:ext cx="12192000" cy="964824"/>
           </a:xfrm>
         </p:spPr>
         <p:txBody>
-          <a:bodyPr/>
+          <a:bodyPr>
+            <a:normAutofit fontScale="90000"/>
+          </a:bodyPr>
           <a:lstStyle/>
           <a:p>
+            <a:pPr algn="ctr"/>
             <a:r>
               <a:rPr lang="en-US" dirty="0"/>
-              <a:t>Open Science for BILLWG</a:t>
+              <a:t>Open Science with Documentation and Reproducibility </a:t>
+            </a:r>
+            <a:br>
+              <a:rPr lang="en-US" dirty="0"/>
+            </a:br>
+            <a:r>
+              <a:rPr lang="en-US" dirty="0"/>
+              <a:t>for the ISC Billfish Working Group</a:t>
             </a:r>
           </a:p>
         </p:txBody>
@@ -6125,19 +6135,19 @@
         </p:nvSpPr>
         <p:spPr>
           <a:xfrm>
-            <a:off x="0" y="1059366"/>
-            <a:ext cx="12192000" cy="5798633"/>
+            <a:off x="0" y="1460938"/>
+            <a:ext cx="12192000" cy="5397061"/>
           </a:xfrm>
         </p:spPr>
         <p:txBody>
           <a:bodyPr>
-            <a:normAutofit/>
+            <a:normAutofit lnSpcReduction="10000"/>
           </a:bodyPr>
           <a:lstStyle/>
           <a:p>
             <a:r>
               <a:rPr lang="en-US" dirty="0"/>
-              <a:t>This presentation is on BILLWG google drive at: </a:t>
+              <a:t>This presentation (NAME.pptx) is on the BILLWG google drive at: </a:t>
             </a:r>
             <a:r>
               <a:rPr lang="en-US" dirty="0">
@@ -6153,7 +6163,7 @@
           <a:p>
             <a:r>
               <a:rPr lang="en-US" dirty="0"/>
-              <a:t>To access results, download GitHub repository</a:t>
+              <a:t>To access the projection methods and results, clone or download the GitHub repository:</a:t>
             </a:r>
           </a:p>
           <a:p>
